--- a/make_presentation/templates/templates/premium/no_logo_12.pptx
+++ b/make_presentation/templates/templates/premium/no_logo_12.pptx
@@ -306,7 +306,7 @@
             <a:pPr algn="r">
               <a:buNone/>
             </a:pPr>
-            <a:fld id="{3DA04E94-EBC8-419D-9973-D680BF004D3F}" type="slidenum">
+            <a:fld id="{8ADB8B57-A834-4DF9-B99A-5C92F9A824B4}" type="slidenum">
               <a:rPr b="0" lang="en-US" sz="1400" spc="-1" strike="noStrike">
                 <a:latin typeface="Times New Roman"/>
               </a:rPr>
@@ -343,7 +343,7 @@
       </p:grpSpPr>
       <p:sp>
         <p:nvSpPr>
-          <p:cNvPr id="179" name="PlaceHolder 1"/>
+          <p:cNvPr id="177" name="PlaceHolder 1"/>
           <p:cNvSpPr>
             <a:spLocks noGrp="1"/>
           </p:cNvSpPr>
@@ -366,7 +366,7 @@
       </p:sp>
       <p:sp>
         <p:nvSpPr>
-          <p:cNvPr id="180" name="PlaceHolder 2"/>
+          <p:cNvPr id="178" name="PlaceHolder 2"/>
           <p:cNvSpPr>
             <a:spLocks noGrp="1"/>
           </p:cNvSpPr>
@@ -400,7 +400,7 @@
       </p:sp>
       <p:sp>
         <p:nvSpPr>
-          <p:cNvPr id="181" name="PlaceHolder 3"/>
+          <p:cNvPr id="179" name="PlaceHolder 3"/>
           <p:cNvSpPr>
             <a:spLocks noGrp="1"/>
           </p:cNvSpPr>
@@ -447,7 +447,7 @@
               </a:lnSpc>
               <a:buNone/>
             </a:pPr>
-            <a:fld id="{C88EFE2C-5E17-4189-854E-59A79973653A}" type="slidenum">
+            <a:fld id="{361D20BC-94BC-4872-B838-66D25A78C9A5}" type="slidenum">
               <a:rPr b="0" lang="en-US" sz="1800" spc="-1" strike="noStrike">
                 <a:solidFill>
                   <a:srgbClr val="000000"/>
@@ -487,7 +487,7 @@
       </p:grpSpPr>
       <p:sp>
         <p:nvSpPr>
-          <p:cNvPr id="206" name="PlaceHolder 1"/>
+          <p:cNvPr id="204" name="PlaceHolder 1"/>
           <p:cNvSpPr>
             <a:spLocks noGrp="1"/>
           </p:cNvSpPr>
@@ -510,7 +510,7 @@
       </p:sp>
       <p:sp>
         <p:nvSpPr>
-          <p:cNvPr id="207" name="PlaceHolder 2"/>
+          <p:cNvPr id="205" name="PlaceHolder 2"/>
           <p:cNvSpPr>
             <a:spLocks noGrp="1"/>
           </p:cNvSpPr>
@@ -544,7 +544,7 @@
       </p:sp>
       <p:sp>
         <p:nvSpPr>
-          <p:cNvPr id="208" name="PlaceHolder 3"/>
+          <p:cNvPr id="206" name="PlaceHolder 3"/>
           <p:cNvSpPr>
             <a:spLocks noGrp="1"/>
           </p:cNvSpPr>
@@ -591,7 +591,7 @@
               </a:lnSpc>
               <a:buNone/>
             </a:pPr>
-            <a:fld id="{76673313-77F9-4606-A6B1-2812145A6D24}" type="slidenum">
+            <a:fld id="{8DF83944-FEAE-4CE8-BD49-7E71CF2F2F74}" type="slidenum">
               <a:rPr b="0" lang="en-US" sz="1800" spc="-1" strike="noStrike">
                 <a:solidFill>
                   <a:srgbClr val="000000"/>
@@ -631,7 +631,7 @@
       </p:grpSpPr>
       <p:sp>
         <p:nvSpPr>
-          <p:cNvPr id="209" name="PlaceHolder 1"/>
+          <p:cNvPr id="207" name="PlaceHolder 1"/>
           <p:cNvSpPr>
             <a:spLocks noGrp="1"/>
           </p:cNvSpPr>
@@ -654,7 +654,7 @@
       </p:sp>
       <p:sp>
         <p:nvSpPr>
-          <p:cNvPr id="210" name="PlaceHolder 2"/>
+          <p:cNvPr id="208" name="PlaceHolder 2"/>
           <p:cNvSpPr>
             <a:spLocks noGrp="1"/>
           </p:cNvSpPr>
@@ -688,7 +688,7 @@
       </p:sp>
       <p:sp>
         <p:nvSpPr>
-          <p:cNvPr id="211" name="PlaceHolder 3"/>
+          <p:cNvPr id="209" name="PlaceHolder 3"/>
           <p:cNvSpPr>
             <a:spLocks noGrp="1"/>
           </p:cNvSpPr>
@@ -735,7 +735,7 @@
               </a:lnSpc>
               <a:buNone/>
             </a:pPr>
-            <a:fld id="{E87E46B9-1583-4C93-A2B1-18606FF4D60E}" type="slidenum">
+            <a:fld id="{E111D2CD-5B20-4F25-A638-EE7BB0F5079A}" type="slidenum">
               <a:rPr b="0" lang="en-US" sz="1800" spc="-1" strike="noStrike">
                 <a:solidFill>
                   <a:srgbClr val="000000"/>
@@ -775,7 +775,7 @@
       </p:grpSpPr>
       <p:sp>
         <p:nvSpPr>
-          <p:cNvPr id="212" name="PlaceHolder 1"/>
+          <p:cNvPr id="210" name="PlaceHolder 1"/>
           <p:cNvSpPr>
             <a:spLocks noGrp="1"/>
           </p:cNvSpPr>
@@ -798,7 +798,7 @@
       </p:sp>
       <p:sp>
         <p:nvSpPr>
-          <p:cNvPr id="213" name="PlaceHolder 2"/>
+          <p:cNvPr id="211" name="PlaceHolder 2"/>
           <p:cNvSpPr>
             <a:spLocks noGrp="1"/>
           </p:cNvSpPr>
@@ -832,7 +832,7 @@
       </p:sp>
       <p:sp>
         <p:nvSpPr>
-          <p:cNvPr id="214" name="PlaceHolder 3"/>
+          <p:cNvPr id="212" name="PlaceHolder 3"/>
           <p:cNvSpPr>
             <a:spLocks noGrp="1"/>
           </p:cNvSpPr>
@@ -879,7 +879,7 @@
               </a:lnSpc>
               <a:buNone/>
             </a:pPr>
-            <a:fld id="{7F1676EB-B813-49A2-BAE1-75C15C000AB2}" type="slidenum">
+            <a:fld id="{CC41A3D5-AA62-4D4E-A4F8-6D470D90F87E}" type="slidenum">
               <a:rPr b="0" lang="en-US" sz="1800" spc="-1" strike="noStrike">
                 <a:solidFill>
                   <a:srgbClr val="000000"/>
@@ -919,7 +919,7 @@
       </p:grpSpPr>
       <p:sp>
         <p:nvSpPr>
-          <p:cNvPr id="182" name="PlaceHolder 1"/>
+          <p:cNvPr id="180" name="PlaceHolder 1"/>
           <p:cNvSpPr>
             <a:spLocks noGrp="1"/>
           </p:cNvSpPr>
@@ -942,7 +942,7 @@
       </p:sp>
       <p:sp>
         <p:nvSpPr>
-          <p:cNvPr id="183" name="PlaceHolder 2"/>
+          <p:cNvPr id="181" name="PlaceHolder 2"/>
           <p:cNvSpPr>
             <a:spLocks noGrp="1"/>
           </p:cNvSpPr>
@@ -976,7 +976,7 @@
       </p:sp>
       <p:sp>
         <p:nvSpPr>
-          <p:cNvPr id="184" name="PlaceHolder 3"/>
+          <p:cNvPr id="182" name="PlaceHolder 3"/>
           <p:cNvSpPr>
             <a:spLocks noGrp="1"/>
           </p:cNvSpPr>
@@ -1023,7 +1023,7 @@
               </a:lnSpc>
               <a:buNone/>
             </a:pPr>
-            <a:fld id="{D080FA15-ECDA-479B-B8B7-FF5C1CF1D9DF}" type="slidenum">
+            <a:fld id="{AE533D93-3609-4FD3-9899-14F4C367D963}" type="slidenum">
               <a:rPr b="0" lang="en-US" sz="1800" spc="-1" strike="noStrike">
                 <a:solidFill>
                   <a:srgbClr val="000000"/>
@@ -1063,7 +1063,7 @@
       </p:grpSpPr>
       <p:sp>
         <p:nvSpPr>
-          <p:cNvPr id="185" name="PlaceHolder 1"/>
+          <p:cNvPr id="183" name="PlaceHolder 1"/>
           <p:cNvSpPr>
             <a:spLocks noGrp="1"/>
           </p:cNvSpPr>
@@ -1086,7 +1086,7 @@
       </p:sp>
       <p:sp>
         <p:nvSpPr>
-          <p:cNvPr id="186" name="PlaceHolder 2"/>
+          <p:cNvPr id="184" name="PlaceHolder 2"/>
           <p:cNvSpPr>
             <a:spLocks noGrp="1"/>
           </p:cNvSpPr>
@@ -1120,7 +1120,7 @@
       </p:sp>
       <p:sp>
         <p:nvSpPr>
-          <p:cNvPr id="187" name="PlaceHolder 3"/>
+          <p:cNvPr id="185" name="PlaceHolder 3"/>
           <p:cNvSpPr>
             <a:spLocks noGrp="1"/>
           </p:cNvSpPr>
@@ -1167,7 +1167,7 @@
               </a:lnSpc>
               <a:buNone/>
             </a:pPr>
-            <a:fld id="{646B2BC3-EAD5-41BE-BE8A-41B8629E94EF}" type="slidenum">
+            <a:fld id="{B458D30E-5173-4C48-A705-88FD3720494E}" type="slidenum">
               <a:rPr b="0" lang="en-US" sz="1800" spc="-1" strike="noStrike">
                 <a:solidFill>
                   <a:srgbClr val="000000"/>
@@ -1207,7 +1207,7 @@
       </p:grpSpPr>
       <p:sp>
         <p:nvSpPr>
-          <p:cNvPr id="188" name="PlaceHolder 1"/>
+          <p:cNvPr id="186" name="PlaceHolder 1"/>
           <p:cNvSpPr>
             <a:spLocks noGrp="1"/>
           </p:cNvSpPr>
@@ -1230,7 +1230,7 @@
       </p:sp>
       <p:sp>
         <p:nvSpPr>
-          <p:cNvPr id="189" name="PlaceHolder 2"/>
+          <p:cNvPr id="187" name="PlaceHolder 2"/>
           <p:cNvSpPr>
             <a:spLocks noGrp="1"/>
           </p:cNvSpPr>
@@ -1264,7 +1264,7 @@
       </p:sp>
       <p:sp>
         <p:nvSpPr>
-          <p:cNvPr id="190" name="PlaceHolder 3"/>
+          <p:cNvPr id="188" name="PlaceHolder 3"/>
           <p:cNvSpPr>
             <a:spLocks noGrp="1"/>
           </p:cNvSpPr>
@@ -1311,7 +1311,7 @@
               </a:lnSpc>
               <a:buNone/>
             </a:pPr>
-            <a:fld id="{303A6874-B20A-4E4A-94EE-2F422630F24C}" type="slidenum">
+            <a:fld id="{4B7C8164-E305-4ABC-B482-EBCC95650718}" type="slidenum">
               <a:rPr b="0" lang="en-US" sz="1800" spc="-1" strike="noStrike">
                 <a:solidFill>
                   <a:srgbClr val="000000"/>
@@ -1351,7 +1351,7 @@
       </p:grpSpPr>
       <p:sp>
         <p:nvSpPr>
-          <p:cNvPr id="191" name="PlaceHolder 1"/>
+          <p:cNvPr id="189" name="PlaceHolder 1"/>
           <p:cNvSpPr>
             <a:spLocks noGrp="1"/>
           </p:cNvSpPr>
@@ -1374,7 +1374,7 @@
       </p:sp>
       <p:sp>
         <p:nvSpPr>
-          <p:cNvPr id="192" name="PlaceHolder 2"/>
+          <p:cNvPr id="190" name="PlaceHolder 2"/>
           <p:cNvSpPr>
             <a:spLocks noGrp="1"/>
           </p:cNvSpPr>
@@ -1408,7 +1408,7 @@
       </p:sp>
       <p:sp>
         <p:nvSpPr>
-          <p:cNvPr id="193" name="PlaceHolder 3"/>
+          <p:cNvPr id="191" name="PlaceHolder 3"/>
           <p:cNvSpPr>
             <a:spLocks noGrp="1"/>
           </p:cNvSpPr>
@@ -1455,7 +1455,7 @@
               </a:lnSpc>
               <a:buNone/>
             </a:pPr>
-            <a:fld id="{8DEEAE9F-9394-4BAF-ADBE-896F0FF9D2A4}" type="slidenum">
+            <a:fld id="{23FEC2E1-9748-4BF5-A82D-5EA404EAE8E2}" type="slidenum">
               <a:rPr b="0" lang="en-US" sz="1800" spc="-1" strike="noStrike">
                 <a:solidFill>
                   <a:srgbClr val="000000"/>
@@ -1495,7 +1495,7 @@
       </p:grpSpPr>
       <p:sp>
         <p:nvSpPr>
-          <p:cNvPr id="194" name="PlaceHolder 1"/>
+          <p:cNvPr id="192" name="PlaceHolder 1"/>
           <p:cNvSpPr>
             <a:spLocks noGrp="1"/>
           </p:cNvSpPr>
@@ -1518,7 +1518,7 @@
       </p:sp>
       <p:sp>
         <p:nvSpPr>
-          <p:cNvPr id="195" name="PlaceHolder 2"/>
+          <p:cNvPr id="193" name="PlaceHolder 2"/>
           <p:cNvSpPr>
             <a:spLocks noGrp="1"/>
           </p:cNvSpPr>
@@ -1552,7 +1552,7 @@
       </p:sp>
       <p:sp>
         <p:nvSpPr>
-          <p:cNvPr id="196" name="PlaceHolder 3"/>
+          <p:cNvPr id="194" name="PlaceHolder 3"/>
           <p:cNvSpPr>
             <a:spLocks noGrp="1"/>
           </p:cNvSpPr>
@@ -1599,7 +1599,7 @@
               </a:lnSpc>
               <a:buNone/>
             </a:pPr>
-            <a:fld id="{DDA2CC73-4ABD-45E4-8705-0FC128347371}" type="slidenum">
+            <a:fld id="{6D277738-B078-41C1-9D7E-7EF79088560C}" type="slidenum">
               <a:rPr b="0" lang="en-US" sz="1800" spc="-1" strike="noStrike">
                 <a:solidFill>
                   <a:srgbClr val="000000"/>
@@ -1639,7 +1639,7 @@
       </p:grpSpPr>
       <p:sp>
         <p:nvSpPr>
-          <p:cNvPr id="197" name="PlaceHolder 1"/>
+          <p:cNvPr id="195" name="PlaceHolder 1"/>
           <p:cNvSpPr>
             <a:spLocks noGrp="1"/>
           </p:cNvSpPr>
@@ -1662,7 +1662,7 @@
       </p:sp>
       <p:sp>
         <p:nvSpPr>
-          <p:cNvPr id="198" name="PlaceHolder 2"/>
+          <p:cNvPr id="196" name="PlaceHolder 2"/>
           <p:cNvSpPr>
             <a:spLocks noGrp="1"/>
           </p:cNvSpPr>
@@ -1696,7 +1696,7 @@
       </p:sp>
       <p:sp>
         <p:nvSpPr>
-          <p:cNvPr id="199" name="PlaceHolder 3"/>
+          <p:cNvPr id="197" name="PlaceHolder 3"/>
           <p:cNvSpPr>
             <a:spLocks noGrp="1"/>
           </p:cNvSpPr>
@@ -1743,7 +1743,7 @@
               </a:lnSpc>
               <a:buNone/>
             </a:pPr>
-            <a:fld id="{EEACB9FA-95D4-4966-9278-F5791931E84A}" type="slidenum">
+            <a:fld id="{04A8C869-4A00-41AF-A783-E2A60E089E4A}" type="slidenum">
               <a:rPr b="0" lang="en-US" sz="1800" spc="-1" strike="noStrike">
                 <a:solidFill>
                   <a:srgbClr val="000000"/>
@@ -1783,7 +1783,7 @@
       </p:grpSpPr>
       <p:sp>
         <p:nvSpPr>
-          <p:cNvPr id="200" name="PlaceHolder 1"/>
+          <p:cNvPr id="198" name="PlaceHolder 1"/>
           <p:cNvSpPr>
             <a:spLocks noGrp="1"/>
           </p:cNvSpPr>
@@ -1806,7 +1806,7 @@
       </p:sp>
       <p:sp>
         <p:nvSpPr>
-          <p:cNvPr id="201" name="PlaceHolder 2"/>
+          <p:cNvPr id="199" name="PlaceHolder 2"/>
           <p:cNvSpPr>
             <a:spLocks noGrp="1"/>
           </p:cNvSpPr>
@@ -1840,7 +1840,7 @@
       </p:sp>
       <p:sp>
         <p:nvSpPr>
-          <p:cNvPr id="202" name="PlaceHolder 3"/>
+          <p:cNvPr id="200" name="PlaceHolder 3"/>
           <p:cNvSpPr>
             <a:spLocks noGrp="1"/>
           </p:cNvSpPr>
@@ -1887,7 +1887,7 @@
               </a:lnSpc>
               <a:buNone/>
             </a:pPr>
-            <a:fld id="{451C0AD3-9B99-4D92-89D2-E75F9D1A89F9}" type="slidenum">
+            <a:fld id="{AF35B16E-347A-48E7-9AE9-59CCA51E0C00}" type="slidenum">
               <a:rPr b="0" lang="en-US" sz="1800" spc="-1" strike="noStrike">
                 <a:solidFill>
                   <a:srgbClr val="000000"/>
@@ -1927,7 +1927,7 @@
       </p:grpSpPr>
       <p:sp>
         <p:nvSpPr>
-          <p:cNvPr id="203" name="PlaceHolder 1"/>
+          <p:cNvPr id="201" name="PlaceHolder 1"/>
           <p:cNvSpPr>
             <a:spLocks noGrp="1"/>
           </p:cNvSpPr>
@@ -1950,7 +1950,7 @@
       </p:sp>
       <p:sp>
         <p:nvSpPr>
-          <p:cNvPr id="204" name="PlaceHolder 2"/>
+          <p:cNvPr id="202" name="PlaceHolder 2"/>
           <p:cNvSpPr>
             <a:spLocks noGrp="1"/>
           </p:cNvSpPr>
@@ -1984,7 +1984,7 @@
       </p:sp>
       <p:sp>
         <p:nvSpPr>
-          <p:cNvPr id="205" name="PlaceHolder 3"/>
+          <p:cNvPr id="203" name="PlaceHolder 3"/>
           <p:cNvSpPr>
             <a:spLocks noGrp="1"/>
           </p:cNvSpPr>
@@ -2031,7 +2031,7 @@
               </a:lnSpc>
               <a:buNone/>
             </a:pPr>
-            <a:fld id="{C75E96B5-07D5-4B8F-8FCD-6EAAE45540C4}" type="slidenum">
+            <a:fld id="{828C2E03-D853-4219-8E5A-059D098132E7}" type="slidenum">
               <a:rPr b="0" lang="en-US" sz="1800" spc="-1" strike="noStrike">
                 <a:solidFill>
                   <a:srgbClr val="000000"/>
@@ -4074,7 +4074,7 @@
         <p:spPr>
           <a:xfrm>
             <a:off x="457200" y="4027680"/>
-            <a:ext cx="10515600" cy="2144520"/>
+            <a:ext cx="10928880" cy="2030760"/>
           </a:xfrm>
           <a:prstGeom prst="rect">
             <a:avLst/>
@@ -4105,7 +4105,7 @@
               </a:tabLst>
             </a:pPr>
             <a:r>
-              <a:rPr b="1" lang="en-US" sz="4000" spc="-1" strike="noStrike">
+              <a:rPr b="1" lang="en-US" sz="4800" spc="-1" strike="noStrike">
                 <a:solidFill>
                   <a:srgbClr val="ffffff"/>
                 </a:solidFill>
@@ -4114,7 +4114,7 @@
               </a:rPr>
               <a:t>TITLE</a:t>
             </a:r>
-            <a:endParaRPr b="0" lang="en-US" sz="4000" spc="-1" strike="noStrike">
+            <a:endParaRPr b="0" lang="en-US" sz="4800" spc="-1" strike="noStrike">
               <a:latin typeface="Arial"/>
             </a:endParaRPr>
           </a:p>
@@ -4182,7 +4182,7 @@
       </p:grpSpPr>
       <p:sp>
         <p:nvSpPr>
-          <p:cNvPr id="150" name="PIC"/>
+          <p:cNvPr id="148" name="PIC"/>
           <p:cNvSpPr/>
           <p:nvPr/>
         </p:nvSpPr>
@@ -4238,7 +4238,7 @@
       </p:sp>
       <p:sp>
         <p:nvSpPr>
-          <p:cNvPr id="151" name="Линия_1"/>
+          <p:cNvPr id="149" name="Линия_1"/>
           <p:cNvSpPr/>
           <p:nvPr/>
         </p:nvSpPr>
@@ -4266,7 +4266,7 @@
       </p:sp>
       <p:sp>
         <p:nvSpPr>
-          <p:cNvPr id="152" name="SUBTITLE 2"/>
+          <p:cNvPr id="150" name="SUBTITLE 2"/>
           <p:cNvSpPr/>
           <p:nvPr/>
         </p:nvSpPr>
@@ -4321,7 +4321,7 @@
       </p:sp>
       <p:sp>
         <p:nvSpPr>
-          <p:cNvPr id="153" name="TEXT 2"/>
+          <p:cNvPr id="151" name="TEXT 2"/>
           <p:cNvSpPr/>
           <p:nvPr/>
         </p:nvSpPr>
@@ -4376,7 +4376,7 @@
       </p:sp>
       <p:pic>
         <p:nvPicPr>
-          <p:cNvPr id="154" name="Кнопка_Навигация_Фон" descr="/home/claude/vistas/assets/grad_circle.png"/>
+          <p:cNvPr id="152" name="Кнопка_Навигация_Фон" descr="/home/claude/vistas/assets/grad_circle.png"/>
           <p:cNvPicPr/>
           <p:nvPr/>
         </p:nvPicPr>
@@ -4399,7 +4399,7 @@
       </p:pic>
       <p:sp>
         <p:nvSpPr>
-          <p:cNvPr id="155" name="Кнопка_Навигация_Стрелка"/>
+          <p:cNvPr id="153" name="Кнопка_Навигация_Стрелка"/>
           <p:cNvSpPr/>
           <p:nvPr/>
         </p:nvSpPr>
@@ -4454,7 +4454,7 @@
       </p:sp>
       <p:sp>
         <p:nvSpPr>
-          <p:cNvPr id="156" name="TITLE"/>
+          <p:cNvPr id="154" name="TITLE"/>
           <p:cNvSpPr/>
           <p:nvPr/>
         </p:nvSpPr>
@@ -4509,7 +4509,7 @@
       </p:sp>
       <p:sp>
         <p:nvSpPr>
-          <p:cNvPr id="157" name="Иконка_1"/>
+          <p:cNvPr id="155" name="Иконка_1"/>
           <p:cNvSpPr/>
           <p:nvPr/>
         </p:nvSpPr>
@@ -4542,7 +4542,7 @@
       </p:sp>
       <p:pic>
         <p:nvPicPr>
-          <p:cNvPr id="158" name="Иконка_1_Акцент" descr="/home/claude/vistas/assets/grad_square.png"/>
+          <p:cNvPr id="156" name="Иконка_1_Акцент" descr="/home/claude/vistas/assets/grad_square.png"/>
           <p:cNvPicPr/>
           <p:nvPr/>
         </p:nvPicPr>
@@ -4565,7 +4565,7 @@
       </p:pic>
       <p:sp>
         <p:nvSpPr>
-          <p:cNvPr id="159" name="Линия_1"/>
+          <p:cNvPr id="157" name="Линия_1"/>
           <p:cNvSpPr/>
           <p:nvPr/>
         </p:nvSpPr>
@@ -4593,7 +4593,7 @@
       </p:sp>
       <p:sp>
         <p:nvSpPr>
-          <p:cNvPr id="160" name="SUBTITLE 2"/>
+          <p:cNvPr id="158" name="SUBTITLE 2"/>
           <p:cNvSpPr/>
           <p:nvPr/>
         </p:nvSpPr>
@@ -4648,7 +4648,7 @@
       </p:sp>
       <p:sp>
         <p:nvSpPr>
-          <p:cNvPr id="161" name="TEXT 2"/>
+          <p:cNvPr id="159" name="TEXT 2"/>
           <p:cNvSpPr/>
           <p:nvPr/>
         </p:nvSpPr>
@@ -4703,7 +4703,7 @@
       </p:sp>
       <p:sp>
         <p:nvSpPr>
-          <p:cNvPr id="162" name="Иконка_1"/>
+          <p:cNvPr id="160" name="Иконка_1"/>
           <p:cNvSpPr/>
           <p:nvPr/>
         </p:nvSpPr>
@@ -4736,7 +4736,7 @@
       </p:sp>
       <p:pic>
         <p:nvPicPr>
-          <p:cNvPr id="163" name="Иконка_1_Акцент" descr="/home/claude/vistas/assets/grad_square.png"/>
+          <p:cNvPr id="161" name="Иконка_1_Акцент" descr="/home/claude/vistas/assets/grad_square.png"/>
           <p:cNvPicPr/>
           <p:nvPr/>
         </p:nvPicPr>
@@ -4759,7 +4759,7 @@
       </p:pic>
       <p:sp>
         <p:nvSpPr>
-          <p:cNvPr id="164" name="Линия_1"/>
+          <p:cNvPr id="162" name="Линия_1"/>
           <p:cNvSpPr/>
           <p:nvPr/>
         </p:nvSpPr>
@@ -4787,7 +4787,7 @@
       </p:sp>
       <p:sp>
         <p:nvSpPr>
-          <p:cNvPr id="165" name="SUBTITLE 2"/>
+          <p:cNvPr id="163" name="SUBTITLE 2"/>
           <p:cNvSpPr/>
           <p:nvPr/>
         </p:nvSpPr>
@@ -4842,7 +4842,7 @@
       </p:sp>
       <p:sp>
         <p:nvSpPr>
-          <p:cNvPr id="166" name="TEXT 2"/>
+          <p:cNvPr id="164" name="TEXT 2"/>
           <p:cNvSpPr/>
           <p:nvPr/>
         </p:nvSpPr>
@@ -4897,7 +4897,7 @@
       </p:sp>
       <p:sp>
         <p:nvSpPr>
-          <p:cNvPr id="167" name="Иконка_1"/>
+          <p:cNvPr id="165" name="Иконка_1"/>
           <p:cNvSpPr/>
           <p:nvPr/>
         </p:nvSpPr>
@@ -4930,7 +4930,7 @@
       </p:sp>
       <p:pic>
         <p:nvPicPr>
-          <p:cNvPr id="168" name="Иконка_1_Акцент" descr="/home/claude/vistas/assets/grad_square.png"/>
+          <p:cNvPr id="166" name="Иконка_1_Акцент" descr="/home/claude/vistas/assets/grad_square.png"/>
           <p:cNvPicPr/>
           <p:nvPr/>
         </p:nvPicPr>
@@ -4990,7 +4990,7 @@
       </p:grpSpPr>
       <p:sp>
         <p:nvSpPr>
-          <p:cNvPr id="169" name="PIC"/>
+          <p:cNvPr id="167" name="PIC"/>
           <p:cNvSpPr/>
           <p:nvPr/>
         </p:nvSpPr>
@@ -5046,7 +5046,7 @@
       </p:sp>
       <p:sp>
         <p:nvSpPr>
-          <p:cNvPr id="170" name="TITLE"/>
+          <p:cNvPr id="168" name="TITLE"/>
           <p:cNvSpPr/>
           <p:nvPr/>
         </p:nvSpPr>
@@ -5101,7 +5101,7 @@
       </p:sp>
       <p:sp>
         <p:nvSpPr>
-          <p:cNvPr id="171" name="SUBTITLE 1"/>
+          <p:cNvPr id="169" name="SUBTITLE 1"/>
           <p:cNvSpPr/>
           <p:nvPr/>
         </p:nvSpPr>
@@ -5156,7 +5156,7 @@
       </p:sp>
       <p:sp>
         <p:nvSpPr>
-          <p:cNvPr id="172" name="TEXT 1"/>
+          <p:cNvPr id="170" name="TEXT 1"/>
           <p:cNvSpPr/>
           <p:nvPr/>
         </p:nvSpPr>
@@ -5231,7 +5231,7 @@
       </p:sp>
       <p:sp>
         <p:nvSpPr>
-          <p:cNvPr id="173" name="SUBTITLE 2"/>
+          <p:cNvPr id="171" name="SUBTITLE 2"/>
           <p:cNvSpPr/>
           <p:nvPr/>
         </p:nvSpPr>
@@ -5286,7 +5286,7 @@
       </p:sp>
       <p:sp>
         <p:nvSpPr>
-          <p:cNvPr id="174" name="TEXT 2"/>
+          <p:cNvPr id="172" name="TEXT 2"/>
           <p:cNvSpPr/>
           <p:nvPr/>
         </p:nvSpPr>
@@ -5341,7 +5341,7 @@
       </p:sp>
       <p:sp>
         <p:nvSpPr>
-          <p:cNvPr id="175" name="SUBTITLE 2"/>
+          <p:cNvPr id="173" name="SUBTITLE 2"/>
           <p:cNvSpPr/>
           <p:nvPr/>
         </p:nvSpPr>
@@ -5396,7 +5396,7 @@
       </p:sp>
       <p:sp>
         <p:nvSpPr>
-          <p:cNvPr id="176" name="TEXT 2"/>
+          <p:cNvPr id="174" name="TEXT 2"/>
           <p:cNvSpPr/>
           <p:nvPr/>
         </p:nvSpPr>
@@ -5488,7 +5488,7 @@
       </p:grpSpPr>
       <p:pic>
         <p:nvPicPr>
-          <p:cNvPr id="177" name="Градиент_Фон" descr="/home/claude/vistas/assets/grad_full_diagonal.png"/>
+          <p:cNvPr id="175" name="Градиент_Фон" descr="/home/claude/vistas/assets/grad_full_diagonal.png"/>
           <p:cNvPicPr/>
           <p:nvPr/>
         </p:nvPicPr>
@@ -5511,7 +5511,7 @@
       </p:pic>
       <p:sp>
         <p:nvSpPr>
-          <p:cNvPr id="178" name="TITLE"/>
+          <p:cNvPr id="176" name="TITLE"/>
           <p:cNvSpPr/>
           <p:nvPr/>
         </p:nvSpPr>
@@ -8792,67 +8792,14 @@
       </p:grpSpPr>
       <p:sp>
         <p:nvSpPr>
-          <p:cNvPr id="110" name="Затемнение"/>
-          <p:cNvSpPr/>
-          <p:nvPr/>
-        </p:nvSpPr>
-        <p:spPr>
-          <a:xfrm>
-            <a:off x="0" y="1364040"/>
-            <a:ext cx="12188520" cy="5529600"/>
-          </a:xfrm>
-          <a:prstGeom prst="rect">
-            <a:avLst/>
-          </a:prstGeom>
-          <a:solidFill>
-            <a:srgbClr val="d9d9d9"/>
-          </a:solidFill>
-          <a:ln w="0">
-            <a:noFill/>
-          </a:ln>
-        </p:spPr>
-        <p:style>
-          <a:lnRef idx="0"/>
-          <a:fillRef idx="0"/>
-          <a:effectRef idx="0"/>
-          <a:fontRef idx="minor"/>
-        </p:style>
-        <p:txBody>
-          <a:bodyPr lIns="90000" rIns="90000" tIns="45000" bIns="45000" anchor="ctr">
-            <a:noAutofit/>
-          </a:bodyPr>
-          <a:p>
-            <a:pPr algn="ctr">
-              <a:lnSpc>
-                <a:spcPct val="100000"/>
-              </a:lnSpc>
-              <a:buNone/>
-            </a:pPr>
-            <a:r>
-              <a:rPr b="0" lang="en-US" sz="1800" spc="-1" strike="noStrike">
-                <a:solidFill>
-                  <a:srgbClr val="ffffff"/>
-                </a:solidFill>
-                <a:latin typeface="Calibri"/>
-              </a:rPr>
-              <a:t>PIC</a:t>
-            </a:r>
-            <a:endParaRPr b="0" lang="en-US" sz="1800" spc="-1" strike="noStrike">
-              <a:latin typeface="Arial"/>
-            </a:endParaRPr>
-          </a:p>
-        </p:txBody>
-      </p:sp>
-      <p:sp>
-        <p:nvSpPr>
-          <p:cNvPr id="111" name="Чип_1"/>
-          <p:cNvSpPr/>
-          <p:nvPr/>
-        </p:nvSpPr>
-        <p:spPr>
-          <a:xfrm>
-            <a:off x="474480" y="5290560"/>
-            <a:ext cx="4673880" cy="1255680"/>
+          <p:cNvPr id="110" name="Чип_1"/>
+          <p:cNvSpPr/>
+          <p:nvPr/>
+        </p:nvSpPr>
+        <p:spPr>
+          <a:xfrm>
+            <a:off x="639360" y="5290560"/>
+            <a:ext cx="5315040" cy="1255680"/>
           </a:xfrm>
           <a:prstGeom prst="roundRect">
             <a:avLst>
@@ -8880,13 +8827,13 @@
       </p:sp>
       <p:sp>
         <p:nvSpPr>
-          <p:cNvPr id="112" name="SUBTITLE 2"/>
-          <p:cNvSpPr/>
-          <p:nvPr/>
-        </p:nvSpPr>
-        <p:spPr>
-          <a:xfrm>
-            <a:off x="639360" y="5413320"/>
+          <p:cNvPr id="111" name="SUBTITLE 2"/>
+          <p:cNvSpPr/>
+          <p:nvPr/>
+        </p:nvSpPr>
+        <p:spPr>
+          <a:xfrm>
+            <a:off x="803880" y="5413320"/>
             <a:ext cx="4345920" cy="465480"/>
           </a:xfrm>
           <a:prstGeom prst="rect">
@@ -8935,13 +8882,13 @@
       </p:sp>
       <p:sp>
         <p:nvSpPr>
-          <p:cNvPr id="113" name="TEXT 2"/>
-          <p:cNvSpPr/>
-          <p:nvPr/>
-        </p:nvSpPr>
-        <p:spPr>
-          <a:xfrm>
-            <a:off x="639360" y="5952240"/>
+          <p:cNvPr id="112" name="TEXT 2"/>
+          <p:cNvSpPr/>
+          <p:nvPr/>
+        </p:nvSpPr>
+        <p:spPr>
+          <a:xfrm>
+            <a:off x="803880" y="5952240"/>
             <a:ext cx="4345920" cy="502560"/>
           </a:xfrm>
           <a:prstGeom prst="rect">
@@ -8988,94 +8935,16 @@
           </a:p>
         </p:txBody>
       </p:sp>
-      <p:pic>
-        <p:nvPicPr>
-          <p:cNvPr id="114" name="Кнопка_Навигация_Фон" descr="/home/claude/vistas/assets/grad_circle.png"/>
-          <p:cNvPicPr/>
-          <p:nvPr/>
-        </p:nvPicPr>
-        <p:blipFill>
-          <a:blip r:embed="rId1"/>
-          <a:stretch/>
-        </p:blipFill>
-        <p:spPr>
-          <a:xfrm>
-            <a:off x="11228760" y="5897880"/>
-            <a:ext cx="502560" cy="502560"/>
-          </a:xfrm>
-          <a:prstGeom prst="rect">
-            <a:avLst/>
-          </a:prstGeom>
-          <a:ln w="0">
-            <a:noFill/>
-          </a:ln>
-        </p:spPr>
-      </p:pic>
-      <p:sp>
-        <p:nvSpPr>
-          <p:cNvPr id="115" name="Кнопка_Навигация_Стрелка"/>
-          <p:cNvSpPr/>
-          <p:nvPr/>
-        </p:nvSpPr>
-        <p:spPr>
-          <a:xfrm>
-            <a:off x="11228760" y="5897880"/>
-            <a:ext cx="502560" cy="502560"/>
-          </a:xfrm>
-          <a:prstGeom prst="rect">
-            <a:avLst/>
-          </a:prstGeom>
-          <a:noFill/>
-          <a:ln w="0">
-            <a:noFill/>
-          </a:ln>
-        </p:spPr>
-        <p:style>
-          <a:lnRef idx="0"/>
-          <a:fillRef idx="0"/>
-          <a:effectRef idx="0"/>
-          <a:fontRef idx="minor"/>
-        </p:style>
-        <p:txBody>
-          <a:bodyPr lIns="0" rIns="0" tIns="0" bIns="0" anchor="ctr">
-            <a:noAutofit/>
-          </a:bodyPr>
-          <a:p>
-            <a:pPr algn="ctr">
-              <a:lnSpc>
-                <a:spcPct val="100000"/>
-              </a:lnSpc>
-              <a:buNone/>
-              <a:tabLst>
-                <a:tab algn="l" pos="0"/>
-              </a:tabLst>
-            </a:pPr>
-            <a:r>
-              <a:rPr b="1" lang="en-US" sz="2000" spc="-1" strike="noStrike">
-                <a:solidFill>
-                  <a:srgbClr val="ffffff"/>
-                </a:solidFill>
-                <a:latin typeface="Arial"/>
-                <a:ea typeface="Arial"/>
-              </a:rPr>
-              <a:t>→</a:t>
-            </a:r>
-            <a:endParaRPr b="0" lang="en-US" sz="2000" spc="-1" strike="noStrike">
-              <a:latin typeface="Arial"/>
-            </a:endParaRPr>
-          </a:p>
-        </p:txBody>
-      </p:sp>
-      <p:sp>
-        <p:nvSpPr>
-          <p:cNvPr id="116" name="Чип_1"/>
-          <p:cNvSpPr/>
-          <p:nvPr/>
-        </p:nvSpPr>
-        <p:spPr>
-          <a:xfrm>
-            <a:off x="5677560" y="5290560"/>
-            <a:ext cx="4673880" cy="1255680"/>
+      <p:sp>
+        <p:nvSpPr>
+          <p:cNvPr id="113" name="Чип_1"/>
+          <p:cNvSpPr/>
+          <p:nvPr/>
+        </p:nvSpPr>
+        <p:spPr>
+          <a:xfrm>
+            <a:off x="6234480" y="5290560"/>
+            <a:ext cx="5313240" cy="1255680"/>
           </a:xfrm>
           <a:prstGeom prst="roundRect">
             <a:avLst>
@@ -9103,13 +8972,13 @@
       </p:sp>
       <p:sp>
         <p:nvSpPr>
-          <p:cNvPr id="117" name="SUBTITLE 2"/>
-          <p:cNvSpPr/>
-          <p:nvPr/>
-        </p:nvSpPr>
-        <p:spPr>
-          <a:xfrm>
-            <a:off x="5842080" y="5413320"/>
+          <p:cNvPr id="114" name="SUBTITLE 2"/>
+          <p:cNvSpPr/>
+          <p:nvPr/>
+        </p:nvSpPr>
+        <p:spPr>
+          <a:xfrm>
+            <a:off x="6399000" y="5413320"/>
             <a:ext cx="4345920" cy="465480"/>
           </a:xfrm>
           <a:prstGeom prst="rect">
@@ -9168,13 +9037,13 @@
       </p:sp>
       <p:sp>
         <p:nvSpPr>
-          <p:cNvPr id="118" name="TEXT 2"/>
-          <p:cNvSpPr/>
-          <p:nvPr/>
-        </p:nvSpPr>
-        <p:spPr>
-          <a:xfrm>
-            <a:off x="5842080" y="5952240"/>
+          <p:cNvPr id="115" name="TEXT 2"/>
+          <p:cNvSpPr/>
+          <p:nvPr/>
+        </p:nvSpPr>
+        <p:spPr>
+          <a:xfrm>
+            <a:off x="6399000" y="5952240"/>
             <a:ext cx="4345920" cy="502560"/>
           </a:xfrm>
           <a:prstGeom prst="rect">
@@ -9233,14 +9102,14 @@
       </p:sp>
       <p:sp>
         <p:nvSpPr>
-          <p:cNvPr id="119" name="Чип_1"/>
-          <p:cNvSpPr/>
-          <p:nvPr/>
-        </p:nvSpPr>
-        <p:spPr>
-          <a:xfrm>
-            <a:off x="474480" y="4143240"/>
-            <a:ext cx="9876960" cy="977040"/>
+          <p:cNvPr id="116" name="Чип_1"/>
+          <p:cNvSpPr/>
+          <p:nvPr/>
+        </p:nvSpPr>
+        <p:spPr>
+          <a:xfrm>
+            <a:off x="639360" y="4143240"/>
+            <a:ext cx="10908360" cy="977040"/>
           </a:xfrm>
           <a:prstGeom prst="roundRect">
             <a:avLst>
@@ -9268,13 +9137,13 @@
       </p:sp>
       <p:sp>
         <p:nvSpPr>
-          <p:cNvPr id="120" name="SUBTITLE 2"/>
-          <p:cNvSpPr/>
-          <p:nvPr/>
-        </p:nvSpPr>
-        <p:spPr>
-          <a:xfrm>
-            <a:off x="639360" y="4143240"/>
+          <p:cNvPr id="117" name="SUBTITLE 2"/>
+          <p:cNvSpPr/>
+          <p:nvPr/>
+        </p:nvSpPr>
+        <p:spPr>
+          <a:xfrm>
+            <a:off x="803880" y="4143240"/>
             <a:ext cx="9549000" cy="309600"/>
           </a:xfrm>
           <a:prstGeom prst="rect">
@@ -9333,13 +9202,13 @@
       </p:sp>
       <p:sp>
         <p:nvSpPr>
-          <p:cNvPr id="121" name="TEXT 2"/>
-          <p:cNvSpPr/>
-          <p:nvPr/>
-        </p:nvSpPr>
-        <p:spPr>
-          <a:xfrm>
-            <a:off x="639360" y="4526280"/>
+          <p:cNvPr id="118" name="TEXT 2"/>
+          <p:cNvSpPr/>
+          <p:nvPr/>
+        </p:nvSpPr>
+        <p:spPr>
+          <a:xfrm>
+            <a:off x="803880" y="4526280"/>
             <a:ext cx="9549000" cy="502560"/>
           </a:xfrm>
           <a:prstGeom prst="rect">
@@ -9398,7 +9267,7 @@
       </p:sp>
       <p:sp>
         <p:nvSpPr>
-          <p:cNvPr id="122" name="TITLE"/>
+          <p:cNvPr id="119" name="TITLE"/>
           <p:cNvSpPr/>
           <p:nvPr/>
         </p:nvSpPr>
@@ -9446,6 +9315,66 @@
               <a:t>TITLE</a:t>
             </a:r>
             <a:endParaRPr b="0" lang="en-US" sz="3200" spc="-1" strike="noStrike">
+              <a:latin typeface="Arial"/>
+            </a:endParaRPr>
+          </a:p>
+        </p:txBody>
+      </p:sp>
+      <p:sp>
+        <p:nvSpPr>
+          <p:cNvPr id="120" name="PIC 1"/>
+          <p:cNvSpPr/>
+          <p:nvPr/>
+        </p:nvSpPr>
+        <p:spPr>
+          <a:xfrm>
+            <a:off x="638280" y="1410840"/>
+            <a:ext cx="10908360" cy="2447640"/>
+          </a:xfrm>
+          <a:prstGeom prst="roundRect">
+            <a:avLst>
+              <a:gd name="adj" fmla="val 4706"/>
+            </a:avLst>
+          </a:prstGeom>
+          <a:solidFill>
+            <a:schemeClr val="bg1">
+              <a:lumMod val="85000"/>
+            </a:schemeClr>
+          </a:solidFill>
+          <a:ln w="9525">
+            <a:solidFill>
+              <a:srgbClr val="6e6e6e"/>
+            </a:solidFill>
+            <a:round/>
+          </a:ln>
+        </p:spPr>
+        <p:style>
+          <a:lnRef idx="0"/>
+          <a:fillRef idx="0"/>
+          <a:effectRef idx="0"/>
+          <a:fontRef idx="minor"/>
+        </p:style>
+        <p:txBody>
+          <a:bodyPr lIns="90000" rIns="90000" tIns="45000" bIns="45000" anchor="ctr">
+            <a:noAutofit/>
+          </a:bodyPr>
+          <a:p>
+            <a:pPr algn="ctr">
+              <a:lnSpc>
+                <a:spcPct val="100000"/>
+              </a:lnSpc>
+              <a:buNone/>
+            </a:pPr>
+            <a:r>
+              <a:rPr b="0" lang="en-US" sz="1800" spc="-1" strike="noStrike">
+                <a:solidFill>
+                  <a:srgbClr val="ffffff"/>
+                </a:solidFill>
+                <a:latin typeface="Calibri"/>
+              </a:rPr>
+              <a:t>PIC</a:t>
+            </a:r>
+            <a:endParaRPr b="0" lang="en-US" sz="1800" spc="-1" strike="noStrike">
               <a:latin typeface="Arial"/>
             </a:endParaRPr>
           </a:p>
@@ -9490,7 +9419,7 @@
       </p:grpSpPr>
       <p:sp>
         <p:nvSpPr>
-          <p:cNvPr id="123" name="Блок_3"/>
+          <p:cNvPr id="121" name="Блок_3"/>
           <p:cNvSpPr/>
           <p:nvPr/>
         </p:nvSpPr>
@@ -9523,7 +9452,7 @@
       </p:sp>
       <p:sp>
         <p:nvSpPr>
-          <p:cNvPr id="124" name="Блок_1"/>
+          <p:cNvPr id="122" name="Блок_1"/>
           <p:cNvSpPr/>
           <p:nvPr/>
         </p:nvSpPr>
@@ -9556,7 +9485,7 @@
       </p:sp>
       <p:pic>
         <p:nvPicPr>
-          <p:cNvPr id="125" name="Кнопка_Навигация_Фон" descr="/home/claude/vistas/assets/grad_circle.png"/>
+          <p:cNvPr id="123" name="Кнопка_Навигация_Фон" descr="/home/claude/vistas/assets/grad_circle.png"/>
           <p:cNvPicPr/>
           <p:nvPr/>
         </p:nvPicPr>
@@ -9579,7 +9508,7 @@
       </p:pic>
       <p:sp>
         <p:nvSpPr>
-          <p:cNvPr id="126" name="SUBTITLE 1"/>
+          <p:cNvPr id="124" name="SUBTITLE 1"/>
           <p:cNvSpPr/>
           <p:nvPr/>
         </p:nvSpPr>
@@ -9634,7 +9563,7 @@
       </p:sp>
       <p:sp>
         <p:nvSpPr>
-          <p:cNvPr id="127" name="TEXT 1"/>
+          <p:cNvPr id="125" name="TEXT 1"/>
           <p:cNvSpPr/>
           <p:nvPr/>
         </p:nvSpPr>
@@ -9689,7 +9618,7 @@
       </p:sp>
       <p:sp>
         <p:nvSpPr>
-          <p:cNvPr id="128" name="Блок_2"/>
+          <p:cNvPr id="126" name="Блок_2"/>
           <p:cNvSpPr/>
           <p:nvPr/>
         </p:nvSpPr>
@@ -9722,7 +9651,7 @@
       </p:sp>
       <p:sp>
         <p:nvSpPr>
-          <p:cNvPr id="129" name="SUBTITLE 2"/>
+          <p:cNvPr id="127" name="SUBTITLE 2"/>
           <p:cNvSpPr/>
           <p:nvPr/>
         </p:nvSpPr>
@@ -9777,7 +9706,7 @@
       </p:sp>
       <p:sp>
         <p:nvSpPr>
-          <p:cNvPr id="130" name="TEXT 2"/>
+          <p:cNvPr id="128" name="TEXT 2"/>
           <p:cNvSpPr/>
           <p:nvPr/>
         </p:nvSpPr>
@@ -9832,7 +9761,7 @@
       </p:sp>
       <p:sp>
         <p:nvSpPr>
-          <p:cNvPr id="131" name="SUBTITLE 3"/>
+          <p:cNvPr id="129" name="SUBTITLE 3"/>
           <p:cNvSpPr/>
           <p:nvPr/>
         </p:nvSpPr>
@@ -9887,7 +9816,7 @@
       </p:sp>
       <p:sp>
         <p:nvSpPr>
-          <p:cNvPr id="132" name="TEXT 3"/>
+          <p:cNvPr id="130" name="TEXT 3"/>
           <p:cNvSpPr/>
           <p:nvPr/>
         </p:nvSpPr>
@@ -9942,7 +9871,7 @@
       </p:sp>
       <p:sp>
         <p:nvSpPr>
-          <p:cNvPr id="133" name="TITLE"/>
+          <p:cNvPr id="131" name="TITLE"/>
           <p:cNvSpPr/>
           <p:nvPr/>
         </p:nvSpPr>
@@ -9997,7 +9926,7 @@
       </p:sp>
       <p:sp>
         <p:nvSpPr>
-          <p:cNvPr id="134" name="Кнопка_Навигация_Стрелка"/>
+          <p:cNvPr id="132" name="Кнопка_Навигация_Стрелка"/>
           <p:cNvSpPr/>
           <p:nvPr/>
         </p:nvSpPr>
@@ -10089,7 +10018,7 @@
       </p:grpSpPr>
       <p:sp>
         <p:nvSpPr>
-          <p:cNvPr id="135" name="Карточка_1"/>
+          <p:cNvPr id="133" name="Карточка_1"/>
           <p:cNvSpPr/>
           <p:nvPr/>
         </p:nvSpPr>
@@ -10122,7 +10051,7 @@
       </p:sp>
       <p:sp>
         <p:nvSpPr>
-          <p:cNvPr id="136" name="PIC 1"/>
+          <p:cNvPr id="134" name="PIC 1"/>
           <p:cNvSpPr/>
           <p:nvPr/>
         </p:nvSpPr>
@@ -10180,7 +10109,7 @@
       </p:sp>
       <p:sp>
         <p:nvSpPr>
-          <p:cNvPr id="137" name="SUBTITLE 1"/>
+          <p:cNvPr id="135" name="SUBTITLE 1"/>
           <p:cNvSpPr/>
           <p:nvPr/>
         </p:nvSpPr>
@@ -10235,7 +10164,7 @@
       </p:sp>
       <p:sp>
         <p:nvSpPr>
-          <p:cNvPr id="138" name="TEXT 1"/>
+          <p:cNvPr id="136" name="TEXT 1"/>
           <p:cNvSpPr/>
           <p:nvPr/>
         </p:nvSpPr>
@@ -10290,7 +10219,7 @@
       </p:sp>
       <p:sp>
         <p:nvSpPr>
-          <p:cNvPr id="139" name="Карточка_2"/>
+          <p:cNvPr id="137" name="Карточка_2"/>
           <p:cNvSpPr/>
           <p:nvPr/>
         </p:nvSpPr>
@@ -10323,7 +10252,7 @@
       </p:sp>
       <p:sp>
         <p:nvSpPr>
-          <p:cNvPr id="140" name="PIC 2"/>
+          <p:cNvPr id="138" name="PIC 2"/>
           <p:cNvSpPr/>
           <p:nvPr/>
         </p:nvSpPr>
@@ -10381,7 +10310,7 @@
       </p:sp>
       <p:sp>
         <p:nvSpPr>
-          <p:cNvPr id="141" name="SUBTITLE 2"/>
+          <p:cNvPr id="139" name="SUBTITLE 2"/>
           <p:cNvSpPr/>
           <p:nvPr/>
         </p:nvSpPr>
@@ -10436,7 +10365,7 @@
       </p:sp>
       <p:sp>
         <p:nvSpPr>
-          <p:cNvPr id="142" name="TEXT 2"/>
+          <p:cNvPr id="140" name="TEXT 2"/>
           <p:cNvSpPr/>
           <p:nvPr/>
         </p:nvSpPr>
@@ -10491,7 +10420,7 @@
       </p:sp>
       <p:sp>
         <p:nvSpPr>
-          <p:cNvPr id="143" name="Карточка_3"/>
+          <p:cNvPr id="141" name="Карточка_3"/>
           <p:cNvSpPr/>
           <p:nvPr/>
         </p:nvSpPr>
@@ -10524,7 +10453,7 @@
       </p:sp>
       <p:sp>
         <p:nvSpPr>
-          <p:cNvPr id="144" name="PIC 3"/>
+          <p:cNvPr id="142" name="PIC 3"/>
           <p:cNvSpPr/>
           <p:nvPr/>
         </p:nvSpPr>
@@ -10582,7 +10511,7 @@
       </p:sp>
       <p:sp>
         <p:nvSpPr>
-          <p:cNvPr id="145" name="SUBTITLE 3"/>
+          <p:cNvPr id="143" name="SUBTITLE 3"/>
           <p:cNvSpPr/>
           <p:nvPr/>
         </p:nvSpPr>
@@ -10637,7 +10566,7 @@
       </p:sp>
       <p:sp>
         <p:nvSpPr>
-          <p:cNvPr id="146" name="TEXT 3"/>
+          <p:cNvPr id="144" name="TEXT 3"/>
           <p:cNvSpPr/>
           <p:nvPr/>
         </p:nvSpPr>
@@ -10692,7 +10621,7 @@
       </p:sp>
       <p:sp>
         <p:nvSpPr>
-          <p:cNvPr id="147" name="TITLE"/>
+          <p:cNvPr id="145" name="TITLE"/>
           <p:cNvSpPr/>
           <p:nvPr/>
         </p:nvSpPr>
@@ -10747,7 +10676,7 @@
       </p:sp>
       <p:pic>
         <p:nvPicPr>
-          <p:cNvPr id="148" name="Кнопка_Навигация_Фон" descr="/home/claude/vistas/assets/grad_circle.png"/>
+          <p:cNvPr id="146" name="Кнопка_Навигация_Фон" descr="/home/claude/vistas/assets/grad_circle.png"/>
           <p:cNvPicPr/>
           <p:nvPr/>
         </p:nvPicPr>
@@ -10770,7 +10699,7 @@
       </p:pic>
       <p:sp>
         <p:nvSpPr>
-          <p:cNvPr id="149" name="Кнопка_Навигация_Стрелка"/>
+          <p:cNvPr id="147" name="Кнопка_Навигация_Стрелка"/>
           <p:cNvSpPr/>
           <p:nvPr/>
         </p:nvSpPr>
